--- a/fixtures/packs/swiss-specimen-presented-night.pptx
+++ b/fixtures/packs/swiss-specimen-presented-night.pptx
@@ -3963,7 +3963,7 @@
                 <a:gridCol w="2543340"/>
                 <a:gridCol w="8568660"/>
               </a:tblGrid>
-              <a:tr h="305160">
+              <a:tr h="305520">
                 <a:tc>
                   <a:txBody>
                     <a:bodyPr/>
@@ -4057,7 +4057,7 @@
                   </a:tcPr>
                 </a:tc>
               </a:tr>
-              <a:tr h="494136">
+              <a:tr h="494496">
                 <a:tc>
                   <a:txBody>
                     <a:bodyPr/>
@@ -4151,7 +4151,7 @@
                   </a:tcPr>
                 </a:tc>
               </a:tr>
-              <a:tr h="494136">
+              <a:tr h="494496">
                 <a:tc>
                   <a:txBody>
                     <a:bodyPr/>
@@ -4245,7 +4245,7 @@
                   </a:tcPr>
                 </a:tc>
               </a:tr>
-              <a:tr h="494136">
+              <a:tr h="494496">
                 <a:tc>
                   <a:txBody>
                     <a:bodyPr/>
@@ -4339,7 +4339,7 @@
                   </a:tcPr>
                 </a:tc>
               </a:tr>
-              <a:tr h="494136">
+              <a:tr h="494496">
                 <a:tc>
                   <a:txBody>
                     <a:bodyPr/>
@@ -4433,7 +4433,7 @@
                   </a:tcPr>
                 </a:tc>
               </a:tr>
-              <a:tr h="494136">
+              <a:tr h="494496">
                 <a:tc>
                   <a:txBody>
                     <a:bodyPr/>

--- a/fixtures/packs/swiss-specimen-presented-night.pptx
+++ b/fixtures/packs/swiss-specimen-presented-night.pptx
@@ -3552,7 +3552,7 @@
         <p:spPr>
           <a:xfrm>
             <a:off x="540000" y="2349000"/>
-            <a:ext cx="7348000" cy="1890000"/>
+            <a:ext cx="7348000" cy="1829160"/>
           </a:xfrm>
           <a:prstGeom prst="rect">
             <a:avLst/>
@@ -3597,8 +3597,8 @@
         </p:nvSpPr>
         <p:spPr>
           <a:xfrm>
-            <a:off x="540000" y="4239000"/>
-            <a:ext cx="7348000" cy="1440000"/>
+            <a:off x="540000" y="4178160"/>
+            <a:ext cx="7348000" cy="1500840"/>
           </a:xfrm>
           <a:prstGeom prst="rect">
             <a:avLst/>

--- a/fixtures/packs/swiss-specimen-presented-night.pptx
+++ b/fixtures/packs/swiss-specimen-presented-night.pptx
@@ -1243,7 +1243,7 @@
           <a:noFill/>
         </p:spPr>
         <p:txBody>
-          <a:bodyPr vert="horz" wrap="square" lIns="0" tIns="0" rIns="0" bIns="0" rtlCol="0" anchor="t">
+          <a:bodyPr vert="horz" wrap="square" lIns="0" tIns="0" rIns="0" bIns="18582" rtlCol="0" anchor="b">
             <a:noAutofit/>
           </a:bodyPr>
           <a:lstStyle>
@@ -1742,7 +1742,7 @@
           <a:noFill/>
         </p:spPr>
         <p:txBody>
-          <a:bodyPr vert="horz" wrap="square" lIns="0" tIns="0" rIns="0" bIns="0" rtlCol="0" anchor="t">
+          <a:bodyPr vert="horz" wrap="square" lIns="0" tIns="0" rIns="0" bIns="13514" rtlCol="0" anchor="b">
             <a:noAutofit/>
           </a:bodyPr>
           <a:lstStyle>
@@ -1923,7 +1923,7 @@
           <a:noFill/>
         </p:spPr>
         <p:txBody>
-          <a:bodyPr vert="horz" wrap="square" lIns="0" tIns="0" rIns="0" bIns="0" rtlCol="0" anchor="t">
+          <a:bodyPr vert="horz" wrap="square" lIns="0" tIns="0" rIns="0" bIns="13514" rtlCol="0" anchor="b">
             <a:noAutofit/>
           </a:bodyPr>
           <a:lstStyle>
@@ -2285,7 +2285,7 @@
           <a:noFill/>
         </p:spPr>
         <p:txBody>
-          <a:bodyPr vert="horz" wrap="square" lIns="0" tIns="0" rIns="0" bIns="0" rtlCol="0" anchor="t">
+          <a:bodyPr vert="horz" wrap="square" lIns="0" tIns="0" rIns="0" bIns="18582" rtlCol="0" anchor="b">
             <a:noAutofit/>
           </a:bodyPr>
           <a:lstStyle>
@@ -3088,7 +3088,7 @@
         </p:nvSpPr>
         <p:spPr/>
         <p:txBody>
-          <a:bodyPr lIns="0" tIns="0" rIns="0" bIns="0" wrap="square" anchor="t">
+          <a:bodyPr lIns="0" tIns="0" rIns="0" bIns="18582" wrap="square" anchor="b">
             <a:noAutofit/>
           </a:bodyPr>
           <a:lstStyle/>
@@ -3388,7 +3388,7 @@
         </p:nvSpPr>
         <p:spPr/>
         <p:txBody>
-          <a:bodyPr lIns="0" tIns="0" rIns="0" bIns="0" wrap="square" anchor="t">
+          <a:bodyPr lIns="0" tIns="0" rIns="0" bIns="13514" wrap="square" anchor="b">
             <a:noAutofit/>
           </a:bodyPr>
           <a:lstStyle/>
@@ -3665,7 +3665,7 @@
         </p:nvSpPr>
         <p:spPr/>
         <p:txBody>
-          <a:bodyPr lIns="0" tIns="0" rIns="0" bIns="0" wrap="square" anchor="t">
+          <a:bodyPr lIns="0" tIns="0" rIns="0" bIns="13514" wrap="square" anchor="b">
             <a:noAutofit/>
           </a:bodyPr>
           <a:lstStyle/>
@@ -3827,7 +3827,7 @@
         </p:nvSpPr>
         <p:spPr/>
         <p:txBody>
-          <a:bodyPr lIns="0" tIns="0" rIns="0" bIns="0" wrap="square" anchor="t">
+          <a:bodyPr lIns="0" tIns="0" rIns="0" bIns="13514" wrap="square" anchor="b">
             <a:noAutofit/>
           </a:bodyPr>
           <a:lstStyle/>
@@ -4561,7 +4561,7 @@
         </p:nvSpPr>
         <p:spPr/>
         <p:txBody>
-          <a:bodyPr lIns="0" tIns="0" rIns="0" bIns="0" wrap="square" anchor="t">
+          <a:bodyPr lIns="0" tIns="0" rIns="0" bIns="13514" wrap="square" anchor="b">
             <a:noAutofit/>
           </a:bodyPr>
           <a:lstStyle/>
@@ -4875,7 +4875,7 @@
         </p:nvSpPr>
         <p:spPr/>
         <p:txBody>
-          <a:bodyPr lIns="0" tIns="0" rIns="0" bIns="0" wrap="square" anchor="t">
+          <a:bodyPr lIns="0" tIns="0" rIns="0" bIns="18582" wrap="square" anchor="b">
             <a:noAutofit/>
           </a:bodyPr>
           <a:lstStyle/>

--- a/fixtures/packs/swiss-specimen-presented-night.pptx
+++ b/fixtures/packs/swiss-specimen-presented-night.pptx
@@ -1243,7 +1243,7 @@
           <a:noFill/>
         </p:spPr>
         <p:txBody>
-          <a:bodyPr vert="horz" wrap="square" lIns="0" tIns="0" rIns="0" bIns="18582" rtlCol="0" anchor="b">
+          <a:bodyPr vert="horz" wrap="square" lIns="0" tIns="0" rIns="0" bIns="41910" rtlCol="0" anchor="b">
             <a:noAutofit/>
           </a:bodyPr>
           <a:lstStyle>
@@ -1742,7 +1742,7 @@
           <a:noFill/>
         </p:spPr>
         <p:txBody>
-          <a:bodyPr vert="horz" wrap="square" lIns="0" tIns="0" rIns="0" bIns="13514" rtlCol="0" anchor="b">
+          <a:bodyPr vert="horz" wrap="square" lIns="0" tIns="0" rIns="0" bIns="30480" rtlCol="0" anchor="b">
             <a:noAutofit/>
           </a:bodyPr>
           <a:lstStyle>
@@ -1923,7 +1923,7 @@
           <a:noFill/>
         </p:spPr>
         <p:txBody>
-          <a:bodyPr vert="horz" wrap="square" lIns="0" tIns="0" rIns="0" bIns="13514" rtlCol="0" anchor="b">
+          <a:bodyPr vert="horz" wrap="square" lIns="0" tIns="0" rIns="0" bIns="30480" rtlCol="0" anchor="b">
             <a:noAutofit/>
           </a:bodyPr>
           <a:lstStyle>
@@ -2285,7 +2285,7 @@
           <a:noFill/>
         </p:spPr>
         <p:txBody>
-          <a:bodyPr vert="horz" wrap="square" lIns="0" tIns="0" rIns="0" bIns="18582" rtlCol="0" anchor="b">
+          <a:bodyPr vert="horz" wrap="square" lIns="0" tIns="0" rIns="0" bIns="41910" rtlCol="0" anchor="b">
             <a:noAutofit/>
           </a:bodyPr>
           <a:lstStyle>
@@ -3088,7 +3088,7 @@
         </p:nvSpPr>
         <p:spPr/>
         <p:txBody>
-          <a:bodyPr lIns="0" tIns="0" rIns="0" bIns="18582" wrap="square" anchor="b">
+          <a:bodyPr lIns="0" tIns="0" rIns="0" bIns="41910" wrap="square" anchor="b">
             <a:noAutofit/>
           </a:bodyPr>
           <a:lstStyle/>
@@ -3388,7 +3388,7 @@
         </p:nvSpPr>
         <p:spPr/>
         <p:txBody>
-          <a:bodyPr lIns="0" tIns="0" rIns="0" bIns="13514" wrap="square" anchor="b">
+          <a:bodyPr lIns="0" tIns="0" rIns="0" bIns="30480" wrap="square" anchor="b">
             <a:noAutofit/>
           </a:bodyPr>
           <a:lstStyle/>
@@ -3665,7 +3665,7 @@
         </p:nvSpPr>
         <p:spPr/>
         <p:txBody>
-          <a:bodyPr lIns="0" tIns="0" rIns="0" bIns="13514" wrap="square" anchor="b">
+          <a:bodyPr lIns="0" tIns="0" rIns="0" bIns="30480" wrap="square" anchor="b">
             <a:noAutofit/>
           </a:bodyPr>
           <a:lstStyle/>
@@ -3827,7 +3827,7 @@
         </p:nvSpPr>
         <p:spPr/>
         <p:txBody>
-          <a:bodyPr lIns="0" tIns="0" rIns="0" bIns="13514" wrap="square" anchor="b">
+          <a:bodyPr lIns="0" tIns="0" rIns="0" bIns="30480" wrap="square" anchor="b">
             <a:noAutofit/>
           </a:bodyPr>
           <a:lstStyle/>
@@ -4561,7 +4561,7 @@
         </p:nvSpPr>
         <p:spPr/>
         <p:txBody>
-          <a:bodyPr lIns="0" tIns="0" rIns="0" bIns="13514" wrap="square" anchor="b">
+          <a:bodyPr lIns="0" tIns="0" rIns="0" bIns="30480" wrap="square" anchor="b">
             <a:noAutofit/>
           </a:bodyPr>
           <a:lstStyle/>
@@ -4875,7 +4875,7 @@
         </p:nvSpPr>
         <p:spPr/>
         <p:txBody>
-          <a:bodyPr lIns="0" tIns="0" rIns="0" bIns="18582" wrap="square" anchor="b">
+          <a:bodyPr lIns="0" tIns="0" rIns="0" bIns="41910" wrap="square" anchor="b">
             <a:noAutofit/>
           </a:bodyPr>
           <a:lstStyle/>

--- a/fixtures/packs/swiss-specimen-presented-night.pptx
+++ b/fixtures/packs/swiss-specimen-presented-night.pptx
@@ -3963,7 +3963,7 @@
                 <a:gridCol w="2543340"/>
                 <a:gridCol w="8568660"/>
               </a:tblGrid>
-              <a:tr h="305520">
+              <a:tr h="306960">
                 <a:tc>
                   <a:txBody>
                     <a:bodyPr/>
@@ -4057,7 +4057,7 @@
                   </a:tcPr>
                 </a:tc>
               </a:tr>
-              <a:tr h="494496">
+              <a:tr h="495936">
                 <a:tc>
                   <a:txBody>
                     <a:bodyPr/>
@@ -4151,7 +4151,7 @@
                   </a:tcPr>
                 </a:tc>
               </a:tr>
-              <a:tr h="494496">
+              <a:tr h="495936">
                 <a:tc>
                   <a:txBody>
                     <a:bodyPr/>
@@ -4245,7 +4245,7 @@
                   </a:tcPr>
                 </a:tc>
               </a:tr>
-              <a:tr h="494496">
+              <a:tr h="495936">
                 <a:tc>
                   <a:txBody>
                     <a:bodyPr/>
@@ -4339,7 +4339,7 @@
                   </a:tcPr>
                 </a:tc>
               </a:tr>
-              <a:tr h="494496">
+              <a:tr h="495936">
                 <a:tc>
                   <a:txBody>
                     <a:bodyPr/>
@@ -4433,7 +4433,7 @@
                   </a:tcPr>
                 </a:tc>
               </a:tr>
-              <a:tr h="494496">
+              <a:tr h="495936">
                 <a:tc>
                   <a:txBody>
                     <a:bodyPr/>

--- a/fixtures/packs/swiss-specimen-presented-night.pptx
+++ b/fixtures/packs/swiss-specimen-presented-night.pptx
@@ -34,6 +34,7 @@
           <a:srgbClr val="ECECEC"/>
         </a:solidFill>
         <a:latin typeface="+mn-lt"/>
+        <a:cs typeface="+mn-cs"/>
       </a:defRPr>
     </a:lvl1pPr>
     <a:lvl2pPr marL="0" indent="0" algn="l">
@@ -52,6 +53,7 @@
           <a:srgbClr val="ECECEC"/>
         </a:solidFill>
         <a:latin typeface="+mn-lt"/>
+        <a:cs typeface="+mn-cs"/>
       </a:defRPr>
     </a:lvl2pPr>
     <a:lvl3pPr marL="0" indent="0" algn="l">
@@ -70,6 +72,7 @@
           <a:srgbClr val="ECECEC"/>
         </a:solidFill>
         <a:latin typeface="+mn-lt"/>
+        <a:cs typeface="+mn-cs"/>
       </a:defRPr>
     </a:lvl3pPr>
     <a:lvl4pPr marL="0" indent="0" algn="l">
@@ -88,6 +91,7 @@
           <a:srgbClr val="ECECEC"/>
         </a:solidFill>
         <a:latin typeface="+mn-lt"/>
+        <a:cs typeface="+mn-cs"/>
       </a:defRPr>
     </a:lvl4pPr>
     <a:lvl5pPr marL="0" indent="0" algn="l">
@@ -106,6 +110,7 @@
           <a:srgbClr val="ECECEC"/>
         </a:solidFill>
         <a:latin typeface="+mn-lt"/>
+        <a:cs typeface="+mn-cs"/>
       </a:defRPr>
     </a:lvl5pPr>
     <a:lvl6pPr marL="0" indent="0" algn="l">
@@ -124,6 +129,7 @@
           <a:srgbClr val="ECECEC"/>
         </a:solidFill>
         <a:latin typeface="+mn-lt"/>
+        <a:cs typeface="+mn-cs"/>
       </a:defRPr>
     </a:lvl6pPr>
     <a:lvl7pPr marL="0" indent="0" algn="l">
@@ -142,6 +148,7 @@
           <a:srgbClr val="ECECEC"/>
         </a:solidFill>
         <a:latin typeface="+mn-lt"/>
+        <a:cs typeface="+mn-cs"/>
       </a:defRPr>
     </a:lvl7pPr>
     <a:lvl8pPr marL="0" indent="0" algn="l">
@@ -160,6 +167,7 @@
           <a:srgbClr val="ECECEC"/>
         </a:solidFill>
         <a:latin typeface="+mn-lt"/>
+        <a:cs typeface="+mn-cs"/>
       </a:defRPr>
     </a:lvl8pPr>
     <a:lvl9pPr marL="0" indent="0" algn="l">
@@ -178,6 +186,7 @@
           <a:srgbClr val="ECECEC"/>
         </a:solidFill>
         <a:latin typeface="+mn-lt"/>
+        <a:cs typeface="+mn-cs"/>
       </a:defRPr>
     </a:lvl9pPr>
   </p:defaultTextStyle>
@@ -1263,6 +1272,7 @@
                   <a:srgbClr val="ECECEC"/>
                 </a:solidFill>
                 <a:latin typeface="+mj-lt"/>
+                <a:cs typeface="+mj-cs"/>
               </a:defRPr>
             </a:lvl1pPr>
           </a:lstStyle>
@@ -1315,6 +1325,7 @@
                   <a:srgbClr val="ECECEC"/>
                 </a:solidFill>
                 <a:latin typeface="+mn-lt"/>
+                <a:cs typeface="+mn-cs"/>
               </a:defRPr>
             </a:lvl1pPr>
           </a:lstStyle>
@@ -1367,6 +1378,7 @@
                   <a:srgbClr val="A3A7AC"/>
                 </a:solidFill>
                 <a:latin typeface="+mn-lt"/>
+                <a:cs typeface="+mn-cs"/>
               </a:defRPr>
             </a:lvl1pPr>
           </a:lstStyle>
@@ -1452,6 +1464,7 @@
                   <a:srgbClr val="16181B"/>
                 </a:solidFill>
                 <a:latin typeface="+mj-lt"/>
+                <a:cs typeface="+mj-cs"/>
               </a:defRPr>
             </a:lvl1pPr>
           </a:lstStyle>
@@ -1504,6 +1517,7 @@
                   <a:srgbClr val="8A5A00"/>
                 </a:solidFill>
                 <a:latin typeface="+mn-lt"/>
+                <a:cs typeface="+mn-cs"/>
               </a:defRPr>
             </a:lvl1pPr>
           </a:lstStyle>
@@ -1581,6 +1595,7 @@
                   <a:srgbClr val="ECECEC"/>
                 </a:solidFill>
                 <a:latin typeface="+mj-lt"/>
+                <a:cs typeface="+mj-cs"/>
               </a:defRPr>
             </a:lvl1pPr>
           </a:lstStyle>
@@ -1633,6 +1648,7 @@
                   <a:srgbClr val="ECECEC"/>
                 </a:solidFill>
                 <a:latin typeface="+mn-lt"/>
+                <a:cs typeface="+mn-cs"/>
               </a:defRPr>
             </a:lvl1pPr>
           </a:lstStyle>
@@ -1685,6 +1701,7 @@
                   <a:srgbClr val="A3A7AC"/>
                 </a:solidFill>
                 <a:latin typeface="+mn-lt"/>
+                <a:cs typeface="+mn-cs"/>
               </a:defRPr>
             </a:lvl1pPr>
           </a:lstStyle>
@@ -1762,6 +1779,7 @@
                   <a:srgbClr val="ECECEC"/>
                 </a:solidFill>
                 <a:latin typeface="+mj-lt"/>
+                <a:cs typeface="+mj-cs"/>
               </a:defRPr>
             </a:lvl1pPr>
           </a:lstStyle>
@@ -1814,6 +1832,7 @@
                   <a:srgbClr val="ECECEC"/>
                 </a:solidFill>
                 <a:latin typeface="+mn-lt"/>
+                <a:cs typeface="+mn-cs"/>
               </a:defRPr>
             </a:lvl1pPr>
           </a:lstStyle>
@@ -1866,6 +1885,7 @@
                   <a:srgbClr val="A3A7AC"/>
                 </a:solidFill>
                 <a:latin typeface="+mn-lt"/>
+                <a:cs typeface="+mn-cs"/>
               </a:defRPr>
             </a:lvl1pPr>
           </a:lstStyle>
@@ -1943,6 +1963,7 @@
                   <a:srgbClr val="ECECEC"/>
                 </a:solidFill>
                 <a:latin typeface="+mj-lt"/>
+                <a:cs typeface="+mj-cs"/>
               </a:defRPr>
             </a:lvl1pPr>
           </a:lstStyle>
@@ -1995,6 +2016,7 @@
                   <a:srgbClr val="ECECEC"/>
                 </a:solidFill>
                 <a:latin typeface="+mn-lt"/>
+                <a:cs typeface="+mn-cs"/>
               </a:defRPr>
             </a:lvl1pPr>
           </a:lstStyle>
@@ -2047,6 +2069,7 @@
                   <a:srgbClr val="ECECEC"/>
                 </a:solidFill>
                 <a:latin typeface="+mn-lt"/>
+                <a:cs typeface="+mn-cs"/>
               </a:defRPr>
             </a:lvl1pPr>
           </a:lstStyle>
@@ -2099,6 +2122,7 @@
                   <a:srgbClr val="A3A7AC"/>
                 </a:solidFill>
                 <a:latin typeface="+mn-lt"/>
+                <a:cs typeface="+mn-cs"/>
               </a:defRPr>
             </a:lvl1pPr>
           </a:lstStyle>
@@ -2176,6 +2200,7 @@
                   <a:srgbClr val="ECECEC"/>
                 </a:solidFill>
                 <a:latin typeface="+mj-lt"/>
+                <a:cs typeface="+mj-cs"/>
               </a:defRPr>
             </a:lvl1pPr>
           </a:lstStyle>
@@ -2228,6 +2253,7 @@
                   <a:srgbClr val="A3A7AC"/>
                 </a:solidFill>
                 <a:latin typeface="+mn-lt"/>
+                <a:cs typeface="+mn-cs"/>
               </a:defRPr>
             </a:lvl1pPr>
           </a:lstStyle>
@@ -2305,6 +2331,7 @@
                   <a:srgbClr val="ECECEC"/>
                 </a:solidFill>
                 <a:latin typeface="+mj-lt"/>
+                <a:cs typeface="+mj-cs"/>
               </a:defRPr>
             </a:lvl1pPr>
           </a:lstStyle>
@@ -2357,6 +2384,7 @@
                   <a:srgbClr val="ECECEC"/>
                 </a:solidFill>
                 <a:latin typeface="+mn-lt"/>
+                <a:cs typeface="+mn-cs"/>
               </a:defRPr>
             </a:lvl1pPr>
           </a:lstStyle>
@@ -2409,6 +2437,7 @@
                   <a:srgbClr val="A3A7AC"/>
                 </a:solidFill>
                 <a:latin typeface="+mn-lt"/>
+                <a:cs typeface="+mn-cs"/>
               </a:defRPr>
             </a:lvl1pPr>
           </a:lstStyle>
@@ -2494,6 +2523,7 @@
                   <a:srgbClr val="ECECEC"/>
                 </a:solidFill>
                 <a:latin typeface="+mj-lt"/>
+                <a:cs typeface="+mj-cs"/>
               </a:defRPr>
             </a:lvl1pPr>
           </a:lstStyle>
@@ -2546,6 +2576,7 @@
                   <a:srgbClr val="ECECEC"/>
                 </a:solidFill>
                 <a:latin typeface="+mn-lt"/>
+                <a:cs typeface="+mn-cs"/>
               </a:defRPr>
             </a:lvl1pPr>
           </a:lstStyle>
@@ -2587,6 +2618,7 @@
             <a:srgbClr val="ECECEC"/>
           </a:solidFill>
           <a:latin typeface="+mj-lt"/>
+          <a:cs typeface="+mj-cs"/>
         </a:defRPr>
       </a:lvl1pPr>
       <a:lvl2pPr marL="0" indent="0" algn="l">
@@ -2605,6 +2637,7 @@
             <a:srgbClr val="ECECEC"/>
           </a:solidFill>
           <a:latin typeface="+mj-lt"/>
+          <a:cs typeface="+mj-cs"/>
         </a:defRPr>
       </a:lvl2pPr>
       <a:lvl3pPr marL="0" indent="0" algn="l">
@@ -2623,6 +2656,7 @@
             <a:srgbClr val="ECECEC"/>
           </a:solidFill>
           <a:latin typeface="+mj-lt"/>
+          <a:cs typeface="+mj-cs"/>
         </a:defRPr>
       </a:lvl3pPr>
       <a:lvl4pPr marL="0" indent="0" algn="l">
@@ -2641,6 +2675,7 @@
             <a:srgbClr val="ECECEC"/>
           </a:solidFill>
           <a:latin typeface="+mj-lt"/>
+          <a:cs typeface="+mj-cs"/>
         </a:defRPr>
       </a:lvl4pPr>
       <a:lvl5pPr marL="0" indent="0" algn="l">
@@ -2659,6 +2694,7 @@
             <a:srgbClr val="ECECEC"/>
           </a:solidFill>
           <a:latin typeface="+mj-lt"/>
+          <a:cs typeface="+mj-cs"/>
         </a:defRPr>
       </a:lvl5pPr>
       <a:lvl6pPr marL="0" indent="0" algn="l">
@@ -2677,6 +2713,7 @@
             <a:srgbClr val="ECECEC"/>
           </a:solidFill>
           <a:latin typeface="+mj-lt"/>
+          <a:cs typeface="+mj-cs"/>
         </a:defRPr>
       </a:lvl6pPr>
       <a:lvl7pPr marL="0" indent="0" algn="l">
@@ -2695,6 +2732,7 @@
             <a:srgbClr val="ECECEC"/>
           </a:solidFill>
           <a:latin typeface="+mj-lt"/>
+          <a:cs typeface="+mj-cs"/>
         </a:defRPr>
       </a:lvl7pPr>
       <a:lvl8pPr marL="0" indent="0" algn="l">
@@ -2713,6 +2751,7 @@
             <a:srgbClr val="ECECEC"/>
           </a:solidFill>
           <a:latin typeface="+mj-lt"/>
+          <a:cs typeface="+mj-cs"/>
         </a:defRPr>
       </a:lvl8pPr>
       <a:lvl9pPr marL="0" indent="0" algn="l">
@@ -2731,6 +2770,7 @@
             <a:srgbClr val="ECECEC"/>
           </a:solidFill>
           <a:latin typeface="+mj-lt"/>
+          <a:cs typeface="+mj-cs"/>
         </a:defRPr>
       </a:lvl9pPr>
     </p:titleStyle>
@@ -2751,6 +2791,7 @@
             <a:srgbClr val="ECECEC"/>
           </a:solidFill>
           <a:latin typeface="+mn-lt"/>
+          <a:cs typeface="+mn-cs"/>
         </a:defRPr>
       </a:lvl1pPr>
       <a:lvl2pPr marL="0" indent="0" algn="l">
@@ -2769,6 +2810,7 @@
             <a:srgbClr val="ECECEC"/>
           </a:solidFill>
           <a:latin typeface="+mn-lt"/>
+          <a:cs typeface="+mn-cs"/>
         </a:defRPr>
       </a:lvl2pPr>
       <a:lvl3pPr marL="0" indent="0" algn="l">
@@ -2787,6 +2829,7 @@
             <a:srgbClr val="ECECEC"/>
           </a:solidFill>
           <a:latin typeface="+mn-lt"/>
+          <a:cs typeface="+mn-cs"/>
         </a:defRPr>
       </a:lvl3pPr>
       <a:lvl4pPr marL="0" indent="0" algn="l">
@@ -2805,6 +2848,7 @@
             <a:srgbClr val="ECECEC"/>
           </a:solidFill>
           <a:latin typeface="+mn-lt"/>
+          <a:cs typeface="+mn-cs"/>
         </a:defRPr>
       </a:lvl4pPr>
       <a:lvl5pPr marL="0" indent="0" algn="l">
@@ -2823,6 +2867,7 @@
             <a:srgbClr val="ECECEC"/>
           </a:solidFill>
           <a:latin typeface="+mn-lt"/>
+          <a:cs typeface="+mn-cs"/>
         </a:defRPr>
       </a:lvl5pPr>
       <a:lvl6pPr marL="0" indent="0" algn="l">
@@ -2841,6 +2886,7 @@
             <a:srgbClr val="ECECEC"/>
           </a:solidFill>
           <a:latin typeface="+mn-lt"/>
+          <a:cs typeface="+mn-cs"/>
         </a:defRPr>
       </a:lvl6pPr>
       <a:lvl7pPr marL="0" indent="0" algn="l">
@@ -2859,6 +2905,7 @@
             <a:srgbClr val="ECECEC"/>
           </a:solidFill>
           <a:latin typeface="+mn-lt"/>
+          <a:cs typeface="+mn-cs"/>
         </a:defRPr>
       </a:lvl7pPr>
       <a:lvl8pPr marL="0" indent="0" algn="l">
@@ -2877,6 +2924,7 @@
             <a:srgbClr val="ECECEC"/>
           </a:solidFill>
           <a:latin typeface="+mn-lt"/>
+          <a:cs typeface="+mn-cs"/>
         </a:defRPr>
       </a:lvl8pPr>
       <a:lvl9pPr marL="0" indent="0" algn="l">
@@ -2895,6 +2943,7 @@
             <a:srgbClr val="ECECEC"/>
           </a:solidFill>
           <a:latin typeface="+mn-lt"/>
+          <a:cs typeface="+mn-cs"/>
         </a:defRPr>
       </a:lvl9pPr>
     </p:bodyStyle>
@@ -2915,6 +2964,7 @@
             <a:srgbClr val="ECECEC"/>
           </a:solidFill>
           <a:latin typeface="+mn-lt"/>
+          <a:cs typeface="+mn-cs"/>
         </a:defRPr>
       </a:lvl1pPr>
       <a:lvl2pPr marL="0" indent="0" algn="l">
@@ -2933,6 +2983,7 @@
             <a:srgbClr val="ECECEC"/>
           </a:solidFill>
           <a:latin typeface="+mn-lt"/>
+          <a:cs typeface="+mn-cs"/>
         </a:defRPr>
       </a:lvl2pPr>
       <a:lvl3pPr marL="0" indent="0" algn="l">
@@ -2951,6 +3002,7 @@
             <a:srgbClr val="ECECEC"/>
           </a:solidFill>
           <a:latin typeface="+mn-lt"/>
+          <a:cs typeface="+mn-cs"/>
         </a:defRPr>
       </a:lvl3pPr>
       <a:lvl4pPr marL="0" indent="0" algn="l">
@@ -2969,6 +3021,7 @@
             <a:srgbClr val="ECECEC"/>
           </a:solidFill>
           <a:latin typeface="+mn-lt"/>
+          <a:cs typeface="+mn-cs"/>
         </a:defRPr>
       </a:lvl4pPr>
       <a:lvl5pPr marL="0" indent="0" algn="l">
@@ -2987,6 +3040,7 @@
             <a:srgbClr val="ECECEC"/>
           </a:solidFill>
           <a:latin typeface="+mn-lt"/>
+          <a:cs typeface="+mn-cs"/>
         </a:defRPr>
       </a:lvl5pPr>
       <a:lvl6pPr marL="0" indent="0" algn="l">
@@ -3005,6 +3059,7 @@
             <a:srgbClr val="ECECEC"/>
           </a:solidFill>
           <a:latin typeface="+mn-lt"/>
+          <a:cs typeface="+mn-cs"/>
         </a:defRPr>
       </a:lvl6pPr>
       <a:lvl7pPr marL="0" indent="0" algn="l">
@@ -3023,6 +3078,7 @@
             <a:srgbClr val="ECECEC"/>
           </a:solidFill>
           <a:latin typeface="+mn-lt"/>
+          <a:cs typeface="+mn-cs"/>
         </a:defRPr>
       </a:lvl7pPr>
       <a:lvl8pPr marL="0" indent="0" algn="l">
@@ -3041,6 +3097,7 @@
             <a:srgbClr val="ECECEC"/>
           </a:solidFill>
           <a:latin typeface="+mn-lt"/>
+          <a:cs typeface="+mn-cs"/>
         </a:defRPr>
       </a:lvl8pPr>
       <a:lvl9pPr marL="0" indent="0" algn="l">
@@ -3059,6 +3116,7 @@
             <a:srgbClr val="ECECEC"/>
           </a:solidFill>
           <a:latin typeface="+mn-lt"/>
+          <a:cs typeface="+mn-cs"/>
         </a:defRPr>
       </a:lvl9pPr>
     </p:otherStyle>
@@ -3111,6 +3169,7 @@
                   <a:srgbClr val="ECECEC"/>
                 </a:solidFill>
                 <a:latin typeface="+mj-lt"/>
+                <a:cs typeface="+mj-cs"/>
               </a:rPr>
               <a:t>Swiss: a pack for decks that argue</a:t>
             </a:r>
@@ -3152,6 +3211,7 @@
                   <a:srgbClr val="ECECEC"/>
                 </a:solidFill>
                 <a:latin typeface="+mn-lt"/>
+                <a:cs typeface="+mn-cs"/>
               </a:rPr>
               <a:t>A grid, one family per voice, one signal colour, and a single recurring rule.</a:t>
             </a:r>
@@ -3211,6 +3271,7 @@
                   <a:srgbClr val="ECECEC"/>
                 </a:solidFill>
                 <a:latin typeface="+mj-lt"/>
+                <a:cs typeface="+mj-cs"/>
               </a:rPr>
               <a:t>Every value in the deck comes from the pack</a:t>
             </a:r>
@@ -3252,6 +3313,7 @@
                   <a:srgbClr val="ECECEC"/>
                 </a:solidFill>
                 <a:latin typeface="+mn-lt"/>
+                <a:cs typeface="+mn-cs"/>
               </a:rPr>
               <a:t>The pen takes names, never sizes or colours, so a slide cannot drift off the system.</a:t>
             </a:r>
@@ -3311,6 +3373,7 @@
                   <a:srgbClr val="16181B"/>
                 </a:solidFill>
                 <a:latin typeface="+mj-lt"/>
+                <a:cs typeface="+mj-cs"/>
               </a:rPr>
               <a:t>How the pack sets a slide</a:t>
             </a:r>
@@ -3352,6 +3415,7 @@
                   <a:srgbClr val="8A5A00"/>
                 </a:solidFill>
                 <a:latin typeface="+mn-lt"/>
+                <a:cs typeface="+mn-cs"/>
               </a:rPr>
               <a:t>Part one</a:t>
             </a:r>
@@ -3411,6 +3475,7 @@
                   <a:srgbClr val="ECECEC"/>
                 </a:solidFill>
                 <a:latin typeface="+mj-lt"/>
+                <a:cs typeface="+mj-cs"/>
               </a:rPr>
               <a:t>Regions snap to one grid on every slide</a:t>
             </a:r>
@@ -3452,6 +3517,7 @@
                   <a:srgbClr val="ECECEC"/>
                 </a:solidFill>
                 <a:latin typeface="+mn-lt"/>
+                <a:cs typeface="+mn-cs"/>
               </a:rPr>
               <a:t>Every region spans whole columns, so text and figures line up from slide to slide.</a:t>
             </a:r>
@@ -3493,6 +3559,7 @@
                   <a:srgbClr val="A3A7AC"/>
                 </a:solidFill>
                 <a:latin typeface="+mn-lt"/>
+                <a:cs typeface="+mn-cs"/>
               </a:rPr>
               <a:t>Source: pack.toml, [grid]</a:t>
             </a:r>
@@ -3583,6 +3650,7 @@
                   <a:srgbClr val="ECECEC"/>
                 </a:solidFill>
                 <a:latin typeface="+mj-lt"/>
+                <a:cs typeface="+mj-cs"/>
               </a:rPr>
               <a:t>12</a:t>
             </a:r>
@@ -3629,6 +3697,7 @@
                   <a:srgbClr val="A3A7AC"/>
                 </a:solidFill>
                 <a:latin typeface="+mn-lt"/>
+                <a:cs typeface="+mn-cs"/>
               </a:rPr>
               <a:t>columns in the grid</a:t>
             </a:r>
@@ -3688,6 +3757,7 @@
                   <a:srgbClr val="ECECEC"/>
                 </a:solidFill>
                 <a:latin typeface="+mj-lt"/>
+                <a:cs typeface="+mj-cs"/>
               </a:rPr>
               <a:t>Sizes step up so titles always dominate the body</a:t>
             </a:r>
@@ -3729,6 +3799,7 @@
                   <a:srgbClr val="A3A7AC"/>
                 </a:solidFill>
                 <a:latin typeface="+mn-lt"/>
+                <a:cs typeface="+mn-cs"/>
               </a:rPr>
               <a:t>Source: pack.toml, [styles.presented]</a:t>
             </a:r>
@@ -3850,6 +3921,7 @@
                   <a:srgbClr val="ECECEC"/>
                 </a:solidFill>
                 <a:latin typeface="+mj-lt"/>
+                <a:cs typeface="+mj-cs"/>
               </a:rPr>
               <a:t>Each style has one job in the deck</a:t>
             </a:r>
@@ -3891,6 +3963,7 @@
                   <a:srgbClr val="A3A7AC"/>
                 </a:solidFill>
                 <a:latin typeface="+mn-lt"/>
+                <a:cs typeface="+mn-cs"/>
               </a:rPr>
               <a:t>Source: pack.toml, [styles]</a:t>
             </a:r>
@@ -3987,6 +4060,7 @@
                             <a:srgbClr val="A3A7AC"/>
                           </a:solidFill>
                           <a:latin typeface="+mn-lt"/>
+                          <a:cs typeface="+mn-cs"/>
                         </a:rPr>
                         <a:t>Style</a:t>
                       </a:r>
@@ -4033,6 +4107,7 @@
                             <a:srgbClr val="A3A7AC"/>
                           </a:solidFill>
                           <a:latin typeface="+mn-lt"/>
+                          <a:cs typeface="+mn-cs"/>
                         </a:rPr>
                         <a:t>Used for</a:t>
                       </a:r>
@@ -4081,6 +4156,7 @@
                             <a:srgbClr val="ECECEC"/>
                           </a:solidFill>
                           <a:latin typeface="+mn-lt"/>
+                          <a:cs typeface="+mn-cs"/>
                         </a:rPr>
                         <a:t>Headline</a:t>
                       </a:r>
@@ -4127,6 +4203,7 @@
                             <a:srgbClr val="ECECEC"/>
                           </a:solidFill>
                           <a:latin typeface="+mn-lt"/>
+                          <a:cs typeface="+mn-cs"/>
                         </a:rPr>
                         <a:t>Evidence and section titles</a:t>
                       </a:r>
@@ -4175,6 +4252,7 @@
                             <a:srgbClr val="ECECEC"/>
                           </a:solidFill>
                           <a:latin typeface="+mn-lt"/>
+                          <a:cs typeface="+mn-cs"/>
                         </a:rPr>
                         <a:t>Lede</a:t>
                       </a:r>
@@ -4221,6 +4299,7 @@
                             <a:srgbClr val="ECECEC"/>
                           </a:solidFill>
                           <a:latin typeface="+mn-lt"/>
+                          <a:cs typeface="+mn-cs"/>
                         </a:rPr>
                         <a:t>The line that follows a title</a:t>
                       </a:r>
@@ -4269,6 +4348,7 @@
                             <a:srgbClr val="ECECEC"/>
                           </a:solidFill>
                           <a:latin typeface="+mn-lt"/>
+                          <a:cs typeface="+mn-cs"/>
                         </a:rPr>
                         <a:t>Body</a:t>
                       </a:r>
@@ -4315,6 +4395,7 @@
                             <a:srgbClr val="ECECEC"/>
                           </a:solidFill>
                           <a:latin typeface="+mn-lt"/>
+                          <a:cs typeface="+mn-cs"/>
                         </a:rPr>
                         <a:t>Paragraphs and bullets</a:t>
                       </a:r>
@@ -4363,6 +4444,7 @@
                             <a:srgbClr val="ECECEC"/>
                           </a:solidFill>
                           <a:latin typeface="+mn-lt"/>
+                          <a:cs typeface="+mn-cs"/>
                         </a:rPr>
                         <a:t>Label</a:t>
                       </a:r>
@@ -4409,6 +4491,7 @@
                             <a:srgbClr val="ECECEC"/>
                           </a:solidFill>
                           <a:latin typeface="+mn-lt"/>
+                          <a:cs typeface="+mn-cs"/>
                         </a:rPr>
                         <a:t>Figure labels and table headers</a:t>
                       </a:r>
@@ -4457,6 +4540,7 @@
                             <a:srgbClr val="ECECEC"/>
                           </a:solidFill>
                           <a:latin typeface="+mn-lt"/>
+                          <a:cs typeface="+mn-cs"/>
                         </a:rPr>
                         <a:t>Source</a:t>
                       </a:r>
@@ -4503,6 +4587,7 @@
                             <a:srgbClr val="ECECEC"/>
                           </a:solidFill>
                           <a:latin typeface="+mn-lt"/>
+                          <a:cs typeface="+mn-cs"/>
                         </a:rPr>
                         <a:t>Source and note lines</a:t>
                       </a:r>
@@ -4584,6 +4669,7 @@
                   <a:srgbClr val="ECECEC"/>
                 </a:solidFill>
                 <a:latin typeface="+mj-lt"/>
+                <a:cs typeface="+mj-cs"/>
               </a:rPr>
               <a:t>The grid, drawn to scale</a:t>
             </a:r>
@@ -4625,6 +4711,7 @@
                   <a:srgbClr val="ECECEC"/>
                 </a:solidFill>
                 <a:latin typeface="+mn-lt"/>
+                <a:cs typeface="+mn-cs"/>
               </a:rPr>
               <a:t>Margins keep a clear edge</a:t>
             </a:r>
@@ -4648,6 +4735,7 @@
                   <a:srgbClr val="ECECEC"/>
                 </a:solidFill>
                 <a:latin typeface="+mn-lt"/>
+                <a:cs typeface="+mn-cs"/>
               </a:rPr>
               <a:t>Gutters part the columns</a:t>
             </a:r>
@@ -4671,6 +4759,7 @@
                   <a:srgbClr val="ECECEC"/>
                 </a:solidFill>
                 <a:latin typeface="+mn-lt"/>
+                <a:cs typeface="+mn-cs"/>
               </a:rPr>
               <a:t>Rows set the rhythm</a:t>
             </a:r>
@@ -4798,6 +4887,7 @@
                   <a:srgbClr val="ECECEC"/>
                 </a:solidFill>
                 <a:latin typeface="+mj-lt"/>
+                <a:cs typeface="+mj-cs"/>
               </a:rPr>
               <a:t>Statement slides are allowed to be mostly empty, and that emptiness is the point.</a:t>
             </a:r>
@@ -4839,6 +4929,7 @@
                   <a:srgbClr val="A3A7AC"/>
                 </a:solidFill>
                 <a:latin typeface="+mn-lt"/>
+                <a:cs typeface="+mn-cs"/>
               </a:rPr>
               <a:t>The Swiss pack README</a:t>
             </a:r>
@@ -4898,6 +4989,7 @@
                   <a:srgbClr val="ECECEC"/>
                 </a:solidFill>
                 <a:latin typeface="+mj-lt"/>
+                <a:cs typeface="+mj-cs"/>
               </a:rPr>
               <a:t>Build the next deck from the same tokens</a:t>
             </a:r>
@@ -4939,6 +5031,7 @@
                   <a:srgbClr val="ECECEC"/>
                 </a:solidFill>
                 <a:latin typeface="+mn-lt"/>
+                <a:cs typeface="+mn-cs"/>
               </a:rPr>
               <a:t>Start from a brief, pick a voice, and let the pen set the rest.</a:t>
             </a:r>
@@ -4980,6 +5073,7 @@
                   <a:srgbClr val="A3A7AC"/>
                 </a:solidFill>
                 <a:latin typeface="+mn-lt"/>
+                <a:cs typeface="+mn-cs"/>
               </a:rPr>
               <a:t>Note: This specimen shows the pack itself, not a product.</a:t>
             </a:r>
@@ -5039,12 +5133,12 @@
       <a:majorFont>
         <a:latin typeface="Arial"/>
         <a:ea typeface=""/>
-        <a:cs typeface=""/>
+        <a:cs typeface="Arial"/>
       </a:majorFont>
       <a:minorFont>
         <a:latin typeface="Arial"/>
         <a:ea typeface=""/>
-        <a:cs typeface=""/>
+        <a:cs typeface="Arial"/>
       </a:minorFont>
     </a:fontScheme>
     <a:fmtScheme name="swiss">
